--- a/week06/Lecture06.pptx
+++ b/week06/Lecture06.pptx
@@ -30807,19 +30807,28 @@
                 </a:solidFill>
                 <a:latin typeface="Menlo" panose="020B0609030804020204" pitchFamily="49" charset="0"/>
               </a:rPr>
-              <a:t> = </a:t>
-            </a:r>
-            <a:r>
-              <a:rPr lang="en" altLang="zh-CN" dirty="0">
+              <a:t> </a:t>
+            </a:r>
+            <a:r>
+              <a:rPr lang="en" altLang="zh-CN">
+                <a:solidFill>
+                  <a:srgbClr val="000000"/>
+                </a:solidFill>
+                <a:latin typeface="Menlo" panose="020B0609030804020204" pitchFamily="49" charset="0"/>
+              </a:rPr>
+              <a:t>= </a:t>
+            </a:r>
+            <a:r>
+              <a:rPr lang="en" altLang="zh-CN">
                 <a:solidFill>
                   <a:srgbClr val="0000FF"/>
                 </a:solidFill>
                 <a:latin typeface="Menlo" panose="020B0609030804020204" pitchFamily="49" charset="0"/>
               </a:rPr>
-              <a:t>FLT_MIN</a:t>
-            </a:r>
-            <a:r>
-              <a:rPr lang="en" altLang="zh-CN" dirty="0">
+              <a:t>-FLT_MAX</a:t>
+            </a:r>
+            <a:r>
+              <a:rPr lang="en" altLang="zh-CN">
                 <a:solidFill>
                   <a:srgbClr val="000000"/>
                 </a:solidFill>
@@ -30827,6 +30836,12 @@
               </a:rPr>
               <a:t>;</a:t>
             </a:r>
+            <a:endParaRPr lang="en" altLang="zh-CN" dirty="0">
+              <a:solidFill>
+                <a:srgbClr val="000000"/>
+              </a:solidFill>
+              <a:latin typeface="Menlo" panose="020B0609030804020204" pitchFamily="49" charset="0"/>
+            </a:endParaRPr>
           </a:p>
           <a:p>
             <a:r>
